--- a/dist/초3/수학/분수와소수/초3_수학_분수와소수_04_묶음을분수로.pptx
+++ b/dist/초3/수학/분수와소수/초3_수학_분수와소수_04_묶음을분수로.pptx
@@ -119,45 +119,45 @@
   <p:extLst>
     <p:ext uri="{521415D9-36F7-43E2-AB2F-B90AF26B5E84}">
       <p14:sectionLst xmlns:p14="http://schemas.microsoft.com/office/powerpoint/2010/main">
-        <p14:section name="도입" id="{1d03d9ac-b84f-0025-5dc4-b2c3fb4faab2}">
+        <p14:section name="도입" id="{b2cf0d91-98dc-29f0-363c-9dc2aa514de9}">
           <p14:sldIdLst>
             <p14:sldId id="256"/>
             <p14:sldId id="257"/>
           </p14:sldIdLst>
         </p14:section>
-        <p14:section name="개념" id="{c86e16a2-2c47-e938-d3ad-cf0795901b59}">
+        <p14:section name="개념" id="{815df9b5-a031-9b85-9952-6f0f66b6b68c}">
           <p14:sldIdLst>
             <p14:sldId id="258"/>
             <p14:sldId id="259"/>
             <p14:sldId id="262"/>
           </p14:sldIdLst>
         </p14:section>
-        <p14:section name="연습" id="{b67aa316-6f81-1294-4983-506b9a850ebf}">
+        <p14:section name="연습" id="{274d5ded-945b-4164-cc93-19236e38c56a}">
           <p14:sldIdLst>
             <p14:sldId id="260"/>
             <p14:sldId id="261"/>
             <p14:sldId id="263"/>
           </p14:sldIdLst>
         </p14:section>
-        <p14:section name="개념" id="{e9c38a3a-7b3c-3c3a-db43-4a681a7678b2}">
+        <p14:section name="개념" id="{d1044f9b-4626-1deb-26e3-1e34b6aa0df1}">
           <p14:sldIdLst/>
         </p14:section>
-        <p14:section name="연습" id="{487db739-c0b3-347c-46ab-224dedacf2ab}">
+        <p14:section name="연습" id="{70d1a1d5-3056-26c2-f245-a16575628eea}">
           <p14:sldIdLst/>
         </p14:section>
-        <p14:section name="확인" id="{c6e5b5d3-79f8-8225-c9a8-e7879f844b37}">
+        <p14:section name="확인" id="{dc1d2426-8402-6c0f-a4f9-15e0cf2e38e3}">
           <p14:sldIdLst>
             <p14:sldId id="264"/>
             <p14:sldId id="265"/>
             <p14:sldId id="266"/>
           </p14:sldIdLst>
         </p14:section>
-        <p14:section name="정리" id="{5b450204-b2d1-727b-4f6e-45daa271e526}">
+        <p14:section name="정리" id="{569d9ed4-7ef2-7905-1afe-ebfa06c18f46}">
           <p14:sldIdLst>
             <p14:sldId id="267"/>
           </p14:sldIdLst>
         </p14:section>
-        <p14:section name="보충" id="{ba4d4b2c-3d63-7e7d-b0ae-3cf5a1125ec0}">
+        <p14:section name="보충" id="{5ac5de23-6b0c-9e6c-8f8b-0e6fdddfdc35}">
           <p14:sldIdLst>
             <p14:sldId id="268"/>
           </p14:sldIdLst>

--- a/dist/초3/수학/분수와소수/초3_수학_분수와소수_04_묶음을분수로.pptx
+++ b/dist/초3/수학/분수와소수/초3_수학_분수와소수_04_묶음을분수로.pptx
@@ -119,45 +119,45 @@
   <p:extLst>
     <p:ext uri="{521415D9-36F7-43E2-AB2F-B90AF26B5E84}">
       <p14:sectionLst xmlns:p14="http://schemas.microsoft.com/office/powerpoint/2010/main">
-        <p14:section name="도입" id="{b2cf0d91-98dc-29f0-363c-9dc2aa514de9}">
+        <p14:section name="도입" id="{cd83a7df-5032-1cab-b7f0-cecdb34348db}">
           <p14:sldIdLst>
             <p14:sldId id="256"/>
             <p14:sldId id="257"/>
           </p14:sldIdLst>
         </p14:section>
-        <p14:section name="개념" id="{815df9b5-a031-9b85-9952-6f0f66b6b68c}">
+        <p14:section name="개념" id="{67715c68-1543-3fa6-33a5-ffef5d23c72f}">
           <p14:sldIdLst>
             <p14:sldId id="258"/>
             <p14:sldId id="259"/>
             <p14:sldId id="262"/>
           </p14:sldIdLst>
         </p14:section>
-        <p14:section name="연습" id="{274d5ded-945b-4164-cc93-19236e38c56a}">
+        <p14:section name="연습" id="{15d5308d-3561-63dc-cd32-34299cd0a4e9}">
           <p14:sldIdLst>
             <p14:sldId id="260"/>
             <p14:sldId id="261"/>
             <p14:sldId id="263"/>
           </p14:sldIdLst>
         </p14:section>
-        <p14:section name="개념" id="{d1044f9b-4626-1deb-26e3-1e34b6aa0df1}">
+        <p14:section name="개념" id="{cf21a4a6-c65d-c0f9-3ce8-3421f0c586c6}">
           <p14:sldIdLst/>
         </p14:section>
-        <p14:section name="연습" id="{70d1a1d5-3056-26c2-f245-a16575628eea}">
+        <p14:section name="연습" id="{8aa2d4a0-43ca-1583-fd2d-e469d1f13a5e}">
           <p14:sldIdLst/>
         </p14:section>
-        <p14:section name="확인" id="{dc1d2426-8402-6c0f-a4f9-15e0cf2e38e3}">
+        <p14:section name="확인" id="{e268bd5c-155b-e40a-1be9-daf2d802f401}">
           <p14:sldIdLst>
             <p14:sldId id="264"/>
             <p14:sldId id="265"/>
             <p14:sldId id="266"/>
           </p14:sldIdLst>
         </p14:section>
-        <p14:section name="정리" id="{569d9ed4-7ef2-7905-1afe-ebfa06c18f46}">
+        <p14:section name="정리" id="{7237bd4e-d39c-ff65-087e-e7d1f45b7206}">
           <p14:sldIdLst>
             <p14:sldId id="267"/>
           </p14:sldIdLst>
         </p14:section>
-        <p14:section name="보충" id="{5ac5de23-6b0c-9e6c-8f8b-0e6fdddfdc35}">
+        <p14:section name="보충" id="{dea07c5e-cb3c-f35b-17d5-d364bcd31ea1}">
           <p14:sldIdLst>
             <p14:sldId id="268"/>
           </p14:sldIdLst>
@@ -5072,7 +5072,7 @@
         <p:spPr>
           <a:xfrm>
             <a:off x="5011420" y="4237228"/>
-            <a:ext cx="1002284" cy="852424"/>
+            <a:ext cx="1015492" cy="852424"/>
           </a:xfrm>
           <a:prstGeom prst="rect">
             <a:avLst/>
@@ -5110,7 +5110,7 @@
         </p:nvSpPr>
         <p:spPr>
           <a:xfrm>
-            <a:off x="6123432" y="4237228"/>
+            <a:off x="6136640" y="4237228"/>
             <a:ext cx="456438" cy="389636"/>
           </a:xfrm>
           <a:prstGeom prst="rect">
@@ -5149,7 +5149,7 @@
         </p:nvSpPr>
         <p:spPr>
           <a:xfrm>
-            <a:off x="6160008" y="4663440"/>
+            <a:off x="6173216" y="4663440"/>
             <a:ext cx="383286" cy="0"/>
           </a:xfrm>
           <a:prstGeom prst="line">
@@ -5172,7 +5172,7 @@
         </p:nvSpPr>
         <p:spPr>
           <a:xfrm>
-            <a:off x="6123432" y="4700016"/>
+            <a:off x="6136640" y="4700016"/>
             <a:ext cx="456438" cy="389636"/>
           </a:xfrm>
           <a:prstGeom prst="rect">
@@ -5211,7 +5211,7 @@
         </p:nvSpPr>
         <p:spPr>
           <a:xfrm>
-            <a:off x="6689598" y="4237228"/>
+            <a:off x="6702806" y="4237228"/>
             <a:ext cx="394716" cy="852424"/>
           </a:xfrm>
           <a:prstGeom prst="rect">
@@ -5250,7 +5250,7 @@
         </p:nvSpPr>
         <p:spPr>
           <a:xfrm>
-            <a:off x="7339691" y="4519275"/>
+            <a:off x="7352899" y="4519275"/>
             <a:ext cx="288331" cy="288331"/>
           </a:xfrm>
           <a:prstGeom prst="rect">
@@ -5315,7 +5315,7 @@
         <p:spPr>
           <a:xfrm>
             <a:off x="8784844" y="4237228"/>
-            <a:ext cx="1002284" cy="852424"/>
+            <a:ext cx="1015492" cy="852424"/>
           </a:xfrm>
           <a:prstGeom prst="rect">
             <a:avLst/>
@@ -5353,7 +5353,7 @@
         </p:nvSpPr>
         <p:spPr>
           <a:xfrm>
-            <a:off x="9896856" y="4237228"/>
+            <a:off x="9910064" y="4237228"/>
             <a:ext cx="456438" cy="389636"/>
           </a:xfrm>
           <a:prstGeom prst="rect">
@@ -5392,7 +5392,7 @@
         </p:nvSpPr>
         <p:spPr>
           <a:xfrm>
-            <a:off x="9933432" y="4663440"/>
+            <a:off x="9946640" y="4663440"/>
             <a:ext cx="383286" cy="0"/>
           </a:xfrm>
           <a:prstGeom prst="line">
@@ -5415,7 +5415,7 @@
         </p:nvSpPr>
         <p:spPr>
           <a:xfrm>
-            <a:off x="9896856" y="4700016"/>
+            <a:off x="9910064" y="4700016"/>
             <a:ext cx="456438" cy="389636"/>
           </a:xfrm>
           <a:prstGeom prst="rect">
@@ -5454,7 +5454,7 @@
         </p:nvSpPr>
         <p:spPr>
           <a:xfrm>
-            <a:off x="10463022" y="4237228"/>
+            <a:off x="10476230" y="4237228"/>
             <a:ext cx="394716" cy="852424"/>
           </a:xfrm>
           <a:prstGeom prst="rect">
@@ -5493,7 +5493,7 @@
         </p:nvSpPr>
         <p:spPr>
           <a:xfrm>
-            <a:off x="11113115" y="4519275"/>
+            <a:off x="11126323" y="4519275"/>
             <a:ext cx="288331" cy="288331"/>
           </a:xfrm>
           <a:prstGeom prst="rect">
@@ -12688,7 +12688,7 @@
         <p:spPr>
           <a:xfrm>
             <a:off x="548640" y="1351280"/>
-            <a:ext cx="1231900" cy="1092200"/>
+            <a:ext cx="1249172" cy="1092200"/>
           </a:xfrm>
           <a:prstGeom prst="rect">
             <a:avLst/>
@@ -12726,7 +12726,7 @@
         </p:nvSpPr>
         <p:spPr>
           <a:xfrm>
-            <a:off x="1890268" y="1351280"/>
+            <a:off x="1907540" y="1351280"/>
             <a:ext cx="563118" cy="509524"/>
           </a:xfrm>
           <a:prstGeom prst="rect">
@@ -12765,7 +12765,7 @@
         </p:nvSpPr>
         <p:spPr>
           <a:xfrm>
-            <a:off x="1926844" y="1897380"/>
+            <a:off x="1944116" y="1897380"/>
             <a:ext cx="489966" cy="0"/>
           </a:xfrm>
           <a:prstGeom prst="line">
@@ -12788,7 +12788,7 @@
         </p:nvSpPr>
         <p:spPr>
           <a:xfrm>
-            <a:off x="1890268" y="1933956"/>
+            <a:off x="1907540" y="1933956"/>
             <a:ext cx="563118" cy="509524"/>
           </a:xfrm>
           <a:prstGeom prst="rect">
@@ -12827,7 +12827,7 @@
         </p:nvSpPr>
         <p:spPr>
           <a:xfrm>
-            <a:off x="2563114" y="1351280"/>
+            <a:off x="2580386" y="1351280"/>
             <a:ext cx="437388" cy="1092200"/>
           </a:xfrm>
           <a:prstGeom prst="rect">
@@ -12866,7 +12866,7 @@
         </p:nvSpPr>
         <p:spPr>
           <a:xfrm>
-            <a:off x="3261304" y="1708856"/>
+            <a:off x="3278576" y="1708856"/>
             <a:ext cx="377048" cy="377048"/>
           </a:xfrm>
           <a:prstGeom prst="rect">
@@ -14716,7 +14716,7 @@
         <p:spPr>
           <a:xfrm>
             <a:off x="1344168" y="2012696"/>
-            <a:ext cx="1059688" cy="912368"/>
+            <a:ext cx="1073912" cy="912368"/>
           </a:xfrm>
           <a:prstGeom prst="rect">
             <a:avLst/>
@@ -14754,7 +14754,7 @@
         </p:nvSpPr>
         <p:spPr>
           <a:xfrm>
-            <a:off x="2513584" y="2012696"/>
+            <a:off x="2527808" y="2012696"/>
             <a:ext cx="483108" cy="419608"/>
           </a:xfrm>
           <a:prstGeom prst="rect">
@@ -14793,7 +14793,7 @@
         </p:nvSpPr>
         <p:spPr>
           <a:xfrm>
-            <a:off x="2550160" y="2468880"/>
+            <a:off x="2564384" y="2468880"/>
             <a:ext cx="409956" cy="0"/>
           </a:xfrm>
           <a:prstGeom prst="line">
@@ -14816,7 +14816,7 @@
         </p:nvSpPr>
         <p:spPr>
           <a:xfrm>
-            <a:off x="2513584" y="2505456"/>
+            <a:off x="2527808" y="2505456"/>
             <a:ext cx="483108" cy="419608"/>
           </a:xfrm>
           <a:prstGeom prst="rect">
@@ -14855,7 +14855,7 @@
         </p:nvSpPr>
         <p:spPr>
           <a:xfrm>
-            <a:off x="3106420" y="2012696"/>
+            <a:off x="3120644" y="2012696"/>
             <a:ext cx="405384" cy="912368"/>
           </a:xfrm>
           <a:prstGeom prst="rect">
@@ -14894,7 +14894,7 @@
         </p:nvSpPr>
         <p:spPr>
           <a:xfrm>
-            <a:off x="3768537" y="2313625"/>
+            <a:off x="3782761" y="2313625"/>
             <a:ext cx="310510" cy="310510"/>
           </a:xfrm>
           <a:prstGeom prst="rect">
@@ -14967,7 +14967,7 @@
         <p:spPr>
           <a:xfrm>
             <a:off x="1344168" y="3109976"/>
-            <a:ext cx="1059688" cy="912368"/>
+            <a:ext cx="1073912" cy="912368"/>
           </a:xfrm>
           <a:prstGeom prst="rect">
             <a:avLst/>
@@ -15005,7 +15005,7 @@
         </p:nvSpPr>
         <p:spPr>
           <a:xfrm>
-            <a:off x="2513584" y="3109976"/>
+            <a:off x="2527808" y="3109976"/>
             <a:ext cx="483108" cy="419608"/>
           </a:xfrm>
           <a:prstGeom prst="rect">
@@ -15044,7 +15044,7 @@
         </p:nvSpPr>
         <p:spPr>
           <a:xfrm>
-            <a:off x="2550160" y="3566160"/>
+            <a:off x="2564384" y="3566160"/>
             <a:ext cx="409956" cy="0"/>
           </a:xfrm>
           <a:prstGeom prst="line">
@@ -15067,7 +15067,7 @@
         </p:nvSpPr>
         <p:spPr>
           <a:xfrm>
-            <a:off x="2513584" y="3602736"/>
+            <a:off x="2527808" y="3602736"/>
             <a:ext cx="483108" cy="419608"/>
           </a:xfrm>
           <a:prstGeom prst="rect">
@@ -15106,7 +15106,7 @@
         </p:nvSpPr>
         <p:spPr>
           <a:xfrm>
-            <a:off x="3106420" y="3109976"/>
+            <a:off x="3120644" y="3109976"/>
             <a:ext cx="405384" cy="912368"/>
           </a:xfrm>
           <a:prstGeom prst="rect">
@@ -15145,7 +15145,7 @@
         </p:nvSpPr>
         <p:spPr>
           <a:xfrm>
-            <a:off x="3768537" y="3410905"/>
+            <a:off x="3782761" y="3410905"/>
             <a:ext cx="310510" cy="310510"/>
           </a:xfrm>
           <a:prstGeom prst="rect">
@@ -15218,7 +15218,7 @@
         <p:spPr>
           <a:xfrm>
             <a:off x="1344168" y="4207256"/>
-            <a:ext cx="1059688" cy="912368"/>
+            <a:ext cx="1073912" cy="912368"/>
           </a:xfrm>
           <a:prstGeom prst="rect">
             <a:avLst/>
@@ -15256,7 +15256,7 @@
         </p:nvSpPr>
         <p:spPr>
           <a:xfrm>
-            <a:off x="2513584" y="4207256"/>
+            <a:off x="2527808" y="4207256"/>
             <a:ext cx="483108" cy="419608"/>
           </a:xfrm>
           <a:prstGeom prst="rect">
@@ -15295,7 +15295,7 @@
         </p:nvSpPr>
         <p:spPr>
           <a:xfrm>
-            <a:off x="2550160" y="4663440"/>
+            <a:off x="2564384" y="4663440"/>
             <a:ext cx="409956" cy="0"/>
           </a:xfrm>
           <a:prstGeom prst="line">
@@ -15318,7 +15318,7 @@
         </p:nvSpPr>
         <p:spPr>
           <a:xfrm>
-            <a:off x="2513584" y="4700016"/>
+            <a:off x="2527808" y="4700016"/>
             <a:ext cx="483108" cy="419608"/>
           </a:xfrm>
           <a:prstGeom prst="rect">
@@ -15357,7 +15357,7 @@
         </p:nvSpPr>
         <p:spPr>
           <a:xfrm>
-            <a:off x="3106420" y="4207256"/>
+            <a:off x="3120644" y="4207256"/>
             <a:ext cx="405384" cy="912368"/>
           </a:xfrm>
           <a:prstGeom prst="rect">
@@ -15396,7 +15396,7 @@
         </p:nvSpPr>
         <p:spPr>
           <a:xfrm>
-            <a:off x="3768537" y="4508185"/>
+            <a:off x="3782761" y="4508185"/>
             <a:ext cx="310510" cy="310510"/>
           </a:xfrm>
           <a:prstGeom prst="rect">
@@ -16570,7 +16570,7 @@
         <p:spPr>
           <a:xfrm>
             <a:off x="1344168" y="4391660"/>
-            <a:ext cx="1231900" cy="1092200"/>
+            <a:ext cx="1249172" cy="1092200"/>
           </a:xfrm>
           <a:prstGeom prst="rect">
             <a:avLst/>
@@ -16608,7 +16608,7 @@
         </p:nvSpPr>
         <p:spPr>
           <a:xfrm>
-            <a:off x="2685796" y="4391660"/>
+            <a:off x="2703068" y="4391660"/>
             <a:ext cx="563118" cy="509524"/>
           </a:xfrm>
           <a:prstGeom prst="rect">
@@ -16647,7 +16647,7 @@
         </p:nvSpPr>
         <p:spPr>
           <a:xfrm>
-            <a:off x="2722372" y="4937760"/>
+            <a:off x="2739644" y="4937760"/>
             <a:ext cx="489966" cy="0"/>
           </a:xfrm>
           <a:prstGeom prst="line">
@@ -16670,7 +16670,7 @@
         </p:nvSpPr>
         <p:spPr>
           <a:xfrm>
-            <a:off x="2685796" y="4974336"/>
+            <a:off x="2703068" y="4974336"/>
             <a:ext cx="563118" cy="509524"/>
           </a:xfrm>
           <a:prstGeom prst="rect">
@@ -16709,7 +16709,7 @@
         </p:nvSpPr>
         <p:spPr>
           <a:xfrm>
-            <a:off x="3358642" y="4391660"/>
+            <a:off x="3375914" y="4391660"/>
             <a:ext cx="437388" cy="1092200"/>
           </a:xfrm>
           <a:prstGeom prst="rect">
@@ -16748,7 +16748,7 @@
         </p:nvSpPr>
         <p:spPr>
           <a:xfrm>
-            <a:off x="4056832" y="4749236"/>
+            <a:off x="4074104" y="4749236"/>
             <a:ext cx="377048" cy="377048"/>
           </a:xfrm>
           <a:prstGeom prst="rect">
@@ -16821,7 +16821,7 @@
         <p:spPr>
           <a:xfrm>
             <a:off x="7072884" y="4391660"/>
-            <a:ext cx="1231900" cy="1092200"/>
+            <a:ext cx="1249172" cy="1092200"/>
           </a:xfrm>
           <a:prstGeom prst="rect">
             <a:avLst/>
@@ -16859,7 +16859,7 @@
         </p:nvSpPr>
         <p:spPr>
           <a:xfrm>
-            <a:off x="8414512" y="4391660"/>
+            <a:off x="8431784" y="4391660"/>
             <a:ext cx="563118" cy="509524"/>
           </a:xfrm>
           <a:prstGeom prst="rect">
@@ -16898,7 +16898,7 @@
         </p:nvSpPr>
         <p:spPr>
           <a:xfrm>
-            <a:off x="8451088" y="4937760"/>
+            <a:off x="8468360" y="4937760"/>
             <a:ext cx="489966" cy="0"/>
           </a:xfrm>
           <a:prstGeom prst="line">
@@ -16921,7 +16921,7 @@
         </p:nvSpPr>
         <p:spPr>
           <a:xfrm>
-            <a:off x="8414512" y="4974336"/>
+            <a:off x="8431784" y="4974336"/>
             <a:ext cx="563118" cy="509524"/>
           </a:xfrm>
           <a:prstGeom prst="rect">
@@ -16960,7 +16960,7 @@
         </p:nvSpPr>
         <p:spPr>
           <a:xfrm>
-            <a:off x="9087358" y="4391660"/>
+            <a:off x="9104630" y="4391660"/>
             <a:ext cx="437388" cy="1092200"/>
           </a:xfrm>
           <a:prstGeom prst="rect">
@@ -16999,7 +16999,7 @@
         </p:nvSpPr>
         <p:spPr>
           <a:xfrm>
-            <a:off x="9785548" y="4749236"/>
+            <a:off x="9802820" y="4749236"/>
             <a:ext cx="377048" cy="377048"/>
           </a:xfrm>
           <a:prstGeom prst="rect">

--- a/dist/초3/수학/분수와소수/초3_수학_분수와소수_04_묶음을분수로.pptx
+++ b/dist/초3/수학/분수와소수/초3_수학_분수와소수_04_묶음을분수로.pptx
@@ -119,45 +119,45 @@
   <p:extLst>
     <p:ext uri="{521415D9-36F7-43E2-AB2F-B90AF26B5E84}">
       <p14:sectionLst xmlns:p14="http://schemas.microsoft.com/office/powerpoint/2010/main">
-        <p14:section name="도입" id="{cd83a7df-5032-1cab-b7f0-cecdb34348db}">
+        <p14:section name="도입" id="{7da74f20-952d-7331-1fc5-42501b28e8c3}">
           <p14:sldIdLst>
             <p14:sldId id="256"/>
             <p14:sldId id="257"/>
           </p14:sldIdLst>
         </p14:section>
-        <p14:section name="개념" id="{67715c68-1543-3fa6-33a5-ffef5d23c72f}">
+        <p14:section name="개념" id="{093d891e-bebd-17a1-9cd8-9194710a64af}">
           <p14:sldIdLst>
             <p14:sldId id="258"/>
             <p14:sldId id="259"/>
             <p14:sldId id="262"/>
           </p14:sldIdLst>
         </p14:section>
-        <p14:section name="연습" id="{15d5308d-3561-63dc-cd32-34299cd0a4e9}">
+        <p14:section name="연습" id="{58a24a11-025d-8d21-2218-43217ad02a4d}">
           <p14:sldIdLst>
             <p14:sldId id="260"/>
             <p14:sldId id="261"/>
             <p14:sldId id="263"/>
           </p14:sldIdLst>
         </p14:section>
-        <p14:section name="개념" id="{cf21a4a6-c65d-c0f9-3ce8-3421f0c586c6}">
+        <p14:section name="개념" id="{1efca736-a24a-c46a-cda1-87bc0c8cc9d5}">
           <p14:sldIdLst/>
         </p14:section>
-        <p14:section name="연습" id="{8aa2d4a0-43ca-1583-fd2d-e469d1f13a5e}">
+        <p14:section name="연습" id="{6360d5c4-58d9-e47c-3574-30d00491ba06}">
           <p14:sldIdLst/>
         </p14:section>
-        <p14:section name="확인" id="{e268bd5c-155b-e40a-1be9-daf2d802f401}">
+        <p14:section name="확인" id="{e0ec0456-054a-a444-e612-7dab13b477e4}">
           <p14:sldIdLst>
             <p14:sldId id="264"/>
             <p14:sldId id="265"/>
             <p14:sldId id="266"/>
           </p14:sldIdLst>
         </p14:section>
-        <p14:section name="정리" id="{7237bd4e-d39c-ff65-087e-e7d1f45b7206}">
+        <p14:section name="정리" id="{f3c4be49-58da-d385-017c-a408b573638f}">
           <p14:sldIdLst>
             <p14:sldId id="267"/>
           </p14:sldIdLst>
         </p14:section>
-        <p14:section name="보충" id="{dea07c5e-cb3c-f35b-17d5-d364bcd31ea1}">
+        <p14:section name="보충" id="{65ed0987-6d16-bac4-211f-4bce0963108c}">
           <p14:sldIdLst>
             <p14:sldId id="268"/>
           </p14:sldIdLst>
